--- a/exports/pptx/lessons/middle-module-11-multiplication-near-base/day-06-near-1000.pptx
+++ b/exports/pptx/lessons/middle-module-11-multiplication-near-base/day-06-near-1000.pptx
@@ -6143,7 +6143,30 @@
                 <a:ea typeface="Arial" pitchFamily="34" charset="-122"/>
                 <a:cs typeface="Arial" pitchFamily="34" charset="-120"/>
               </a:rPr>
-              <a:t>Answer key (teacher):</a:t>
+              <a:t>Answer key (teacher): </a:t>
+            </a:r>
+            <a:pPr algn="l" indent="0" marL="0">
+              <a:lnSpc>
+                <a:spcPts val="1680"/>
+              </a:lnSpc>
+              <a:spcBef>
+                <a:spcPts val="300"/>
+              </a:spcBef>
+              <a:spcAft>
+                <a:spcPts val="300"/>
+              </a:spcAft>
+              <a:buNone/>
+            </a:pPr>
+            <a:r>
+              <a:rPr lang="en-US" sz="1200" i="1" dirty="0">
+                <a:solidFill>
+                  <a:srgbClr val="1C2833"/>
+                </a:solidFill>
+                <a:latin typeface="Arial" pitchFamily="34" charset="0"/>
+                <a:ea typeface="Arial" pitchFamily="34" charset="-122"/>
+                <a:cs typeface="Arial" pitchFamily="34" charset="-120"/>
+              </a:rPr>
+              <a:t>Each row: Q · Sign · Deficits/excesses · Left · Right (padded) · Answer.</a:t>
             </a:r>
             <a:endParaRPr lang="en-US" sz="1200" dirty="0"/>
           </a:p>
@@ -6157,7 +6180,381 @@
         </p:nvSpPr>
         <p:spPr>
           <a:xfrm>
-            <a:off x="406301" y="5176540"/>
+            <a:off x="634901" y="2631132"/>
+            <a:ext cx="8102798" cy="1988344"/>
+          </a:xfrm>
+          <a:prstGeom prst="rect">
+            <a:avLst/>
+          </a:prstGeom>
+          <a:noFill/>
+          <a:ln/>
+        </p:spPr>
+        <p:txBody>
+          <a:bodyPr wrap="square" lIns="0" tIns="0" rIns="0" bIns="0" rtlCol="0" anchor="t"/>
+          <a:lstStyle/>
+          <a:p>
+            <a:pPr algn="l" marL="342900" indent="-342900">
+              <a:lnSpc>
+                <a:spcPts val="1620"/>
+              </a:lnSpc>
+              <a:spcAft>
+                <a:spcPts val="300"/>
+              </a:spcAft>
+              <a:buSzPct val="100000"/>
+              <a:buChar char="•"/>
+            </a:pPr>
+            <a:r>
+              <a:rPr lang="en-US" sz="1200" b="1" dirty="0">
+                <a:solidFill>
+                  <a:srgbClr val="1C2833"/>
+                </a:solidFill>
+                <a:latin typeface="Arial" pitchFamily="34" charset="0"/>
+                <a:ea typeface="Arial" pitchFamily="34" charset="-122"/>
+                <a:cs typeface="Arial" pitchFamily="34" charset="-120"/>
+              </a:rPr>
+              <a:t>1</a:t>
+            </a:r>
+            <a:pPr algn="l" indent="0" marL="0">
+              <a:lnSpc>
+                <a:spcPts val="1620"/>
+              </a:lnSpc>
+              <a:spcAft>
+                <a:spcPts val="300"/>
+              </a:spcAft>
+              <a:buNone/>
+            </a:pPr>
+            <a:r>
+              <a:rPr lang="en-US" sz="1200" dirty="0">
+                <a:solidFill>
+                  <a:srgbClr val="1C2833"/>
+                </a:solidFill>
+                <a:latin typeface="Arial" pitchFamily="34" charset="0"/>
+                <a:ea typeface="Arial" pitchFamily="34" charset="-122"/>
+                <a:cs typeface="Arial" pitchFamily="34" charset="-120"/>
+              </a:rPr>
+              <a:t> — below · 2, 3 · 995 · 006 · 995006</a:t>
+            </a:r>
+            <a:endParaRPr lang="en-US" sz="1200" dirty="0"/>
+          </a:p>
+          <a:p>
+            <a:pPr algn="l" marL="342900" indent="-342900">
+              <a:lnSpc>
+                <a:spcPts val="1620"/>
+              </a:lnSpc>
+              <a:spcAft>
+                <a:spcPts val="300"/>
+              </a:spcAft>
+              <a:buSzPct val="100000"/>
+              <a:buChar char="•"/>
+            </a:pPr>
+            <a:r>
+              <a:rPr lang="en-US" sz="1200" b="1" dirty="0">
+                <a:solidFill>
+                  <a:srgbClr val="1C2833"/>
+                </a:solidFill>
+                <a:latin typeface="Arial" pitchFamily="34" charset="0"/>
+                <a:ea typeface="Arial" pitchFamily="34" charset="-122"/>
+                <a:cs typeface="Arial" pitchFamily="34" charset="-120"/>
+              </a:rPr>
+              <a:t>2</a:t>
+            </a:r>
+            <a:pPr algn="l" indent="0" marL="0">
+              <a:lnSpc>
+                <a:spcPts val="1620"/>
+              </a:lnSpc>
+              <a:spcAft>
+                <a:spcPts val="300"/>
+              </a:spcAft>
+              <a:buNone/>
+            </a:pPr>
+            <a:r>
+              <a:rPr lang="en-US" sz="1200" dirty="0">
+                <a:solidFill>
+                  <a:srgbClr val="1C2833"/>
+                </a:solidFill>
+                <a:latin typeface="Arial" pitchFamily="34" charset="0"/>
+                <a:ea typeface="Arial" pitchFamily="34" charset="-122"/>
+                <a:cs typeface="Arial" pitchFamily="34" charset="-120"/>
+              </a:rPr>
+              <a:t> — below · 4, 5 · 991 · 020 · 991020</a:t>
+            </a:r>
+            <a:endParaRPr lang="en-US" sz="1200" dirty="0"/>
+          </a:p>
+          <a:p>
+            <a:pPr algn="l" marL="342900" indent="-342900">
+              <a:lnSpc>
+                <a:spcPts val="1620"/>
+              </a:lnSpc>
+              <a:spcAft>
+                <a:spcPts val="300"/>
+              </a:spcAft>
+              <a:buSzPct val="100000"/>
+              <a:buChar char="•"/>
+            </a:pPr>
+            <a:r>
+              <a:rPr lang="en-US" sz="1200" b="1" dirty="0">
+                <a:solidFill>
+                  <a:srgbClr val="1C2833"/>
+                </a:solidFill>
+                <a:latin typeface="Arial" pitchFamily="34" charset="0"/>
+                <a:ea typeface="Arial" pitchFamily="34" charset="-122"/>
+                <a:cs typeface="Arial" pitchFamily="34" charset="-120"/>
+              </a:rPr>
+              <a:t>3</a:t>
+            </a:r>
+            <a:pPr algn="l" indent="0" marL="0">
+              <a:lnSpc>
+                <a:spcPts val="1620"/>
+              </a:lnSpc>
+              <a:spcAft>
+                <a:spcPts val="300"/>
+              </a:spcAft>
+              <a:buNone/>
+            </a:pPr>
+            <a:r>
+              <a:rPr lang="en-US" sz="1200" dirty="0">
+                <a:solidFill>
+                  <a:srgbClr val="1C2833"/>
+                </a:solidFill>
+                <a:latin typeface="Arial" pitchFamily="34" charset="0"/>
+                <a:ea typeface="Arial" pitchFamily="34" charset="-122"/>
+                <a:cs typeface="Arial" pitchFamily="34" charset="-120"/>
+              </a:rPr>
+              <a:t> — below · 1, 2 · 997 · 002 · 997002</a:t>
+            </a:r>
+            <a:endParaRPr lang="en-US" sz="1200" dirty="0"/>
+          </a:p>
+          <a:p>
+            <a:pPr algn="l" marL="342900" indent="-342900">
+              <a:lnSpc>
+                <a:spcPts val="1620"/>
+              </a:lnSpc>
+              <a:spcAft>
+                <a:spcPts val="300"/>
+              </a:spcAft>
+              <a:buSzPct val="100000"/>
+              <a:buChar char="•"/>
+            </a:pPr>
+            <a:r>
+              <a:rPr lang="en-US" sz="1200" b="1" dirty="0">
+                <a:solidFill>
+                  <a:srgbClr val="1C2833"/>
+                </a:solidFill>
+                <a:latin typeface="Arial" pitchFamily="34" charset="0"/>
+                <a:ea typeface="Arial" pitchFamily="34" charset="-122"/>
+                <a:cs typeface="Arial" pitchFamily="34" charset="-120"/>
+              </a:rPr>
+              <a:t>4</a:t>
+            </a:r>
+            <a:pPr algn="l" indent="0" marL="0">
+              <a:lnSpc>
+                <a:spcPts val="1620"/>
+              </a:lnSpc>
+              <a:spcAft>
+                <a:spcPts val="300"/>
+              </a:spcAft>
+              <a:buNone/>
+            </a:pPr>
+            <a:r>
+              <a:rPr lang="en-US" sz="1200" dirty="0">
+                <a:solidFill>
+                  <a:srgbClr val="1C2833"/>
+                </a:solidFill>
+                <a:latin typeface="Arial" pitchFamily="34" charset="0"/>
+                <a:ea typeface="Arial" pitchFamily="34" charset="-122"/>
+                <a:cs typeface="Arial" pitchFamily="34" charset="-120"/>
+              </a:rPr>
+              <a:t> — below · 12, 15 · 973 · 180 · 973180</a:t>
+            </a:r>
+            <a:endParaRPr lang="en-US" sz="1200" dirty="0"/>
+          </a:p>
+          <a:p>
+            <a:pPr algn="l" marL="342900" indent="-342900">
+              <a:lnSpc>
+                <a:spcPts val="1620"/>
+              </a:lnSpc>
+              <a:spcAft>
+                <a:spcPts val="300"/>
+              </a:spcAft>
+              <a:buSzPct val="100000"/>
+              <a:buChar char="•"/>
+            </a:pPr>
+            <a:r>
+              <a:rPr lang="en-US" sz="1200" b="1" dirty="0">
+                <a:solidFill>
+                  <a:srgbClr val="1C2833"/>
+                </a:solidFill>
+                <a:latin typeface="Arial" pitchFamily="34" charset="0"/>
+                <a:ea typeface="Arial" pitchFamily="34" charset="-122"/>
+                <a:cs typeface="Arial" pitchFamily="34" charset="-120"/>
+              </a:rPr>
+              <a:t>5</a:t>
+            </a:r>
+            <a:pPr algn="l" indent="0" marL="0">
+              <a:lnSpc>
+                <a:spcPts val="1620"/>
+              </a:lnSpc>
+              <a:spcAft>
+                <a:spcPts val="300"/>
+              </a:spcAft>
+              <a:buNone/>
+            </a:pPr>
+            <a:r>
+              <a:rPr lang="en-US" sz="1200" dirty="0">
+                <a:solidFill>
+                  <a:srgbClr val="1C2833"/>
+                </a:solidFill>
+                <a:latin typeface="Arial" pitchFamily="34" charset="0"/>
+                <a:ea typeface="Arial" pitchFamily="34" charset="-122"/>
+                <a:cs typeface="Arial" pitchFamily="34" charset="-120"/>
+              </a:rPr>
+              <a:t> — above · 3, 4 · 1007 · 012 · 1007012</a:t>
+            </a:r>
+            <a:endParaRPr lang="en-US" sz="1200" dirty="0"/>
+          </a:p>
+          <a:p>
+            <a:pPr algn="l" marL="342900" indent="-342900">
+              <a:lnSpc>
+                <a:spcPts val="1620"/>
+              </a:lnSpc>
+              <a:spcAft>
+                <a:spcPts val="300"/>
+              </a:spcAft>
+              <a:buSzPct val="100000"/>
+              <a:buChar char="•"/>
+            </a:pPr>
+            <a:r>
+              <a:rPr lang="en-US" sz="1200" b="1" dirty="0">
+                <a:solidFill>
+                  <a:srgbClr val="1C2833"/>
+                </a:solidFill>
+                <a:latin typeface="Arial" pitchFamily="34" charset="0"/>
+                <a:ea typeface="Arial" pitchFamily="34" charset="-122"/>
+                <a:cs typeface="Arial" pitchFamily="34" charset="-120"/>
+              </a:rPr>
+              <a:t>6</a:t>
+            </a:r>
+            <a:pPr algn="l" indent="0" marL="0">
+              <a:lnSpc>
+                <a:spcPts val="1620"/>
+              </a:lnSpc>
+              <a:spcAft>
+                <a:spcPts val="300"/>
+              </a:spcAft>
+              <a:buNone/>
+            </a:pPr>
+            <a:r>
+              <a:rPr lang="en-US" sz="1200" dirty="0">
+                <a:solidFill>
+                  <a:srgbClr val="1C2833"/>
+                </a:solidFill>
+                <a:latin typeface="Arial" pitchFamily="34" charset="0"/>
+                <a:ea typeface="Arial" pitchFamily="34" charset="-122"/>
+                <a:cs typeface="Arial" pitchFamily="34" charset="-120"/>
+              </a:rPr>
+              <a:t> — above · 5, 2 · 1007 · 010 · 1007010</a:t>
+            </a:r>
+            <a:endParaRPr lang="en-US" sz="1200" dirty="0"/>
+          </a:p>
+          <a:p>
+            <a:pPr algn="l" marL="342900" indent="-342900">
+              <a:lnSpc>
+                <a:spcPts val="1620"/>
+              </a:lnSpc>
+              <a:spcAft>
+                <a:spcPts val="300"/>
+              </a:spcAft>
+              <a:buSzPct val="100000"/>
+              <a:buChar char="•"/>
+            </a:pPr>
+            <a:r>
+              <a:rPr lang="en-US" sz="1200" b="1" dirty="0">
+                <a:solidFill>
+                  <a:srgbClr val="1C2833"/>
+                </a:solidFill>
+                <a:latin typeface="Arial" pitchFamily="34" charset="0"/>
+                <a:ea typeface="Arial" pitchFamily="34" charset="-122"/>
+                <a:cs typeface="Arial" pitchFamily="34" charset="-120"/>
+              </a:rPr>
+              <a:t>7</a:t>
+            </a:r>
+            <a:pPr algn="l" indent="0" marL="0">
+              <a:lnSpc>
+                <a:spcPts val="1620"/>
+              </a:lnSpc>
+              <a:spcAft>
+                <a:spcPts val="300"/>
+              </a:spcAft>
+              <a:buNone/>
+            </a:pPr>
+            <a:r>
+              <a:rPr lang="en-US" sz="1200" dirty="0">
+                <a:solidFill>
+                  <a:srgbClr val="1C2833"/>
+                </a:solidFill>
+                <a:latin typeface="Arial" pitchFamily="34" charset="0"/>
+                <a:ea typeface="Arial" pitchFamily="34" charset="-122"/>
+                <a:cs typeface="Arial" pitchFamily="34" charset="-120"/>
+              </a:rPr>
+              <a:t> — mixed · +2, −2 · 1000 · −4 · 999996</a:t>
+            </a:r>
+            <a:endParaRPr lang="en-US" sz="1200" dirty="0"/>
+          </a:p>
+          <a:p>
+            <a:pPr algn="l" marL="342900" indent="-342900">
+              <a:lnSpc>
+                <a:spcPts val="1620"/>
+              </a:lnSpc>
+              <a:spcAft>
+                <a:spcPts val="300"/>
+              </a:spcAft>
+              <a:buSzPct val="100000"/>
+              <a:buChar char="•"/>
+            </a:pPr>
+            <a:r>
+              <a:rPr lang="en-US" sz="1200" b="1" dirty="0">
+                <a:solidFill>
+                  <a:srgbClr val="1C2833"/>
+                </a:solidFill>
+                <a:latin typeface="Arial" pitchFamily="34" charset="0"/>
+                <a:ea typeface="Arial" pitchFamily="34" charset="-122"/>
+                <a:cs typeface="Arial" pitchFamily="34" charset="-120"/>
+              </a:rPr>
+              <a:t>8</a:t>
+            </a:r>
+            <a:pPr algn="l" indent="0" marL="0">
+              <a:lnSpc>
+                <a:spcPts val="1620"/>
+              </a:lnSpc>
+              <a:spcAft>
+                <a:spcPts val="300"/>
+              </a:spcAft>
+              <a:buNone/>
+            </a:pPr>
+            <a:r>
+              <a:rPr lang="en-US" sz="1200" dirty="0">
+                <a:solidFill>
+                  <a:srgbClr val="1C2833"/>
+                </a:solidFill>
+                <a:latin typeface="Arial" pitchFamily="34" charset="0"/>
+                <a:ea typeface="Arial" pitchFamily="34" charset="-122"/>
+                <a:cs typeface="Arial" pitchFamily="34" charset="-120"/>
+              </a:rPr>
+              <a:t> — below · 30, 35 · 935+1=936 · 050 · 936050</a:t>
+            </a:r>
+            <a:endParaRPr lang="en-US" sz="1200" dirty="0"/>
+          </a:p>
+        </p:txBody>
+      </p:sp>
+      <p:sp>
+        <p:nvSpPr>
+          <p:cNvPr id="13" name="Text 11"/>
+          <p:cNvSpPr/>
+          <p:nvPr/>
+        </p:nvSpPr>
+        <p:spPr>
+          <a:xfrm>
+            <a:off x="406301" y="4784527"/>
             <a:ext cx="8498026" cy="213271"/>
           </a:xfrm>
           <a:prstGeom prst="rect">
